--- a/GroundTruth/AddTransitions_GroundTruthA.pptx
+++ b/GroundTruth/AddTransitions_GroundTruthA.pptx
@@ -6992,6 +6992,9 @@
   <p:clrMapOvr>
     <a:masterClrMapping/>
   </p:clrMapOvr>
+  <p:transition spd="slow">
+    <p:fade/>
+  </p:transition>
 </p:sld>
 </file>
 
@@ -7448,7 +7451,7 @@
     <a:masterClrMapping/>
   </p:clrMapOvr>
   <p:transition spd="slow">
-    <p:push dir="u"/>
+    <p:fade/>
   </p:transition>
 </p:sld>
 </file>
@@ -7734,7 +7737,7 @@
     <a:masterClrMapping/>
   </p:clrMapOvr>
   <p:transition spd="slow">
-    <p:push dir="u"/>
+    <p:fade/>
   </p:transition>
 </p:sld>
 </file>
@@ -7995,7 +7998,7 @@
     <a:masterClrMapping/>
   </p:clrMapOvr>
   <p:transition spd="slow">
-    <p:wipe/>
+    <p:fade/>
   </p:transition>
 </p:sld>
 </file>
@@ -8256,7 +8259,7 @@
     <a:masterClrMapping/>
   </p:clrMapOvr>
   <p:transition spd="slow">
-    <p:push dir="u"/>
+    <p:fade/>
   </p:transition>
 </p:sld>
 </file>
@@ -8517,7 +8520,7 @@
     <a:masterClrMapping/>
   </p:clrMapOvr>
   <p:transition spd="slow">
-    <p:wipe/>
+    <p:fade/>
   </p:transition>
 </p:sld>
 </file>
@@ -8732,7 +8735,7 @@
     <a:masterClrMapping/>
   </p:clrMapOvr>
   <p:transition spd="slow">
-    <p:push dir="u"/>
+    <p:fade/>
   </p:transition>
 </p:sld>
 </file>
@@ -8929,7 +8932,7 @@
     <a:masterClrMapping/>
   </p:clrMapOvr>
   <p:transition spd="slow">
-    <p:wipe/>
+    <p:fade/>
   </p:transition>
 </p:sld>
 </file>
@@ -9394,7 +9397,7 @@
     <a:masterClrMapping/>
   </p:clrMapOvr>
   <p:transition spd="slow">
-    <p:wipe/>
+    <p:fade/>
   </p:transition>
 </p:sld>
 </file>
